--- a/docs/git-drs-anvil.pptx
+++ b/docs/git-drs-anvil.pptx
@@ -224,7 +224,7 @@
           <a:p>
             <a:fld id="{61FBB552-75AD-C342-AF75-7CC249E47ECA}" type="datetimeFigureOut">
               <a:rPr lang="en-US" smtClean="0"/>
-              <a:t>9/16/26</a:t>
+              <a:t>9/22/26</a:t>
             </a:fld>
             <a:endParaRPr lang="en-US"/>
           </a:p>
@@ -1140,7 +1140,7 @@
           <a:p>
             <a:fld id="{5BCAD085-E8A6-8845-BD4E-CB4CCA059FC4}" type="datetimeFigureOut">
               <a:rPr lang="en-US" smtClean="0"/>
-              <a:t>9/16/26</a:t>
+              <a:t>9/22/26</a:t>
             </a:fld>
             <a:endParaRPr lang="en-US"/>
           </a:p>
@@ -1308,7 +1308,7 @@
           <a:p>
             <a:fld id="{5BCAD085-E8A6-8845-BD4E-CB4CCA059FC4}" type="datetimeFigureOut">
               <a:rPr lang="en-US" smtClean="0"/>
-              <a:t>9/16/26</a:t>
+              <a:t>9/22/26</a:t>
             </a:fld>
             <a:endParaRPr lang="en-US"/>
           </a:p>
@@ -1486,7 +1486,7 @@
           <a:p>
             <a:fld id="{5BCAD085-E8A6-8845-BD4E-CB4CCA059FC4}" type="datetimeFigureOut">
               <a:rPr lang="en-US" smtClean="0"/>
-              <a:t>9/16/26</a:t>
+              <a:t>9/22/26</a:t>
             </a:fld>
             <a:endParaRPr lang="en-US"/>
           </a:p>
@@ -1654,7 +1654,7 @@
           <a:p>
             <a:fld id="{5BCAD085-E8A6-8845-BD4E-CB4CCA059FC4}" type="datetimeFigureOut">
               <a:rPr lang="en-US" smtClean="0"/>
-              <a:t>9/16/26</a:t>
+              <a:t>9/22/26</a:t>
             </a:fld>
             <a:endParaRPr lang="en-US"/>
           </a:p>
@@ -1899,7 +1899,7 @@
           <a:p>
             <a:fld id="{5BCAD085-E8A6-8845-BD4E-CB4CCA059FC4}" type="datetimeFigureOut">
               <a:rPr lang="en-US" smtClean="0"/>
-              <a:t>9/16/26</a:t>
+              <a:t>9/22/26</a:t>
             </a:fld>
             <a:endParaRPr lang="en-US"/>
           </a:p>
@@ -2184,7 +2184,7 @@
           <a:p>
             <a:fld id="{5BCAD085-E8A6-8845-BD4E-CB4CCA059FC4}" type="datetimeFigureOut">
               <a:rPr lang="en-US" smtClean="0"/>
-              <a:t>9/16/26</a:t>
+              <a:t>9/22/26</a:t>
             </a:fld>
             <a:endParaRPr lang="en-US"/>
           </a:p>
@@ -2603,7 +2603,7 @@
           <a:p>
             <a:fld id="{5BCAD085-E8A6-8845-BD4E-CB4CCA059FC4}" type="datetimeFigureOut">
               <a:rPr lang="en-US" smtClean="0"/>
-              <a:t>9/16/26</a:t>
+              <a:t>9/22/26</a:t>
             </a:fld>
             <a:endParaRPr lang="en-US"/>
           </a:p>
@@ -2720,7 +2720,7 @@
           <a:p>
             <a:fld id="{5BCAD085-E8A6-8845-BD4E-CB4CCA059FC4}" type="datetimeFigureOut">
               <a:rPr lang="en-US" smtClean="0"/>
-              <a:t>9/16/26</a:t>
+              <a:t>9/22/26</a:t>
             </a:fld>
             <a:endParaRPr lang="en-US"/>
           </a:p>
@@ -2815,7 +2815,7 @@
           <a:p>
             <a:fld id="{5BCAD085-E8A6-8845-BD4E-CB4CCA059FC4}" type="datetimeFigureOut">
               <a:rPr lang="en-US" smtClean="0"/>
-              <a:t>9/16/26</a:t>
+              <a:t>9/22/26</a:t>
             </a:fld>
             <a:endParaRPr lang="en-US"/>
           </a:p>
@@ -3090,7 +3090,7 @@
           <a:p>
             <a:fld id="{5BCAD085-E8A6-8845-BD4E-CB4CCA059FC4}" type="datetimeFigureOut">
               <a:rPr lang="en-US" smtClean="0"/>
-              <a:t>9/16/26</a:t>
+              <a:t>9/22/26</a:t>
             </a:fld>
             <a:endParaRPr lang="en-US"/>
           </a:p>
@@ -3342,7 +3342,7 @@
           <a:p>
             <a:fld id="{5BCAD085-E8A6-8845-BD4E-CB4CCA059FC4}" type="datetimeFigureOut">
               <a:rPr lang="en-US" smtClean="0"/>
-              <a:t>9/16/26</a:t>
+              <a:t>9/22/26</a:t>
             </a:fld>
             <a:endParaRPr lang="en-US"/>
           </a:p>
@@ -3553,7 +3553,7 @@
           <a:p>
             <a:fld id="{5BCAD085-E8A6-8845-BD4E-CB4CCA059FC4}" type="datetimeFigureOut">
               <a:rPr lang="en-US" smtClean="0"/>
-              <a:t>9/16/26</a:t>
+              <a:t>9/22/26</a:t>
             </a:fld>
             <a:endParaRPr lang="en-US"/>
           </a:p>
@@ -3930,50 +3930,6 @@
       </p:grpSpPr>
       <p:sp>
         <p:nvSpPr>
-          <p:cNvPr id="2" name="Title 1">
-            <a:extLst>
-              <a:ext uri="{FF2B5EF4-FFF2-40B4-BE49-F238E27FC236}">
-                <a16:creationId xmlns:a16="http://schemas.microsoft.com/office/drawing/2014/main" id="{6F251B9D-773F-5B3A-B78C-1D9E90338404}"/>
-              </a:ext>
-            </a:extLst>
-          </p:cNvPr>
-          <p:cNvSpPr>
-            <a:spLocks noGrp="1"/>
-          </p:cNvSpPr>
-          <p:nvPr>
-            <p:ph type="title"/>
-          </p:nvPr>
-        </p:nvSpPr>
-        <p:spPr/>
-        <p:txBody>
-          <a:bodyPr>
-            <a:noAutofit/>
-          </a:bodyPr>
-          <a:lstStyle/>
-          <a:p>
-            <a:r>
-              <a:rPr lang="en-US" sz="1200" dirty="0"/>
-              <a:t>Publisher: Add the data. Version the references. Share the dataset.</a:t>
-            </a:r>
-            <a:br>
-              <a:rPr lang="en-US" sz="1200" dirty="0"/>
-            </a:br>
-            <a:br>
-              <a:rPr lang="en-US" sz="1200" dirty="0"/>
-            </a:br>
-            <a:r>
-              <a:rPr lang="en-US" sz="1200" dirty="0"/>
-              <a:t>Consumer: Clone the references. Hydrate the data. Reproduce the results.</a:t>
-            </a:r>
-            <a:br>
-              <a:rPr lang="en-US" sz="1200" dirty="0"/>
-            </a:br>
-            <a:endParaRPr lang="en-US" sz="1200" dirty="0"/>
-          </a:p>
-        </p:txBody>
-      </p:sp>
-      <p:sp>
-        <p:nvSpPr>
           <p:cNvPr id="3" name="Text Placeholder 2">
             <a:extLst>
               <a:ext uri="{FF2B5EF4-FFF2-40B4-BE49-F238E27FC236}">
@@ -3994,9 +3950,10 @@
           <a:lstStyle/>
           <a:p>
             <a:r>
-              <a:rPr lang="en-US" b="1" dirty="0"/>
+              <a:rPr lang="en-US" sz="6600" b="1" dirty="0"/>
               <a:t>git-drs</a:t>
             </a:r>
+            <a:endParaRPr lang="en-US" sz="3200" b="1" dirty="0"/>
           </a:p>
           <a:p>
             <a:endParaRPr lang="en-US" b="1" dirty="0"/>
@@ -4066,10 +4023,10 @@
       </p:sp>
       <p:pic>
         <p:nvPicPr>
-          <p:cNvPr id="6" name="Picture 5" descr="AnVIL Portal">
+          <p:cNvPr id="5" name="Picture 4" descr="File:Git icon.svg - Wikimedia Commons">
             <a:extLst>
               <a:ext uri="{FF2B5EF4-FFF2-40B4-BE49-F238E27FC236}">
-                <a16:creationId xmlns:a16="http://schemas.microsoft.com/office/drawing/2014/main" id="{13FE5E56-0204-8A48-4C04-A45A7A2C3A33}"/>
+                <a16:creationId xmlns:a16="http://schemas.microsoft.com/office/drawing/2014/main" id="{B173BDD7-B927-3FBC-4EB2-266019911DF4}"/>
               </a:ext>
             </a:extLst>
           </p:cNvPr>
@@ -4085,9 +4042,69 @@
           </a:stretch>
         </p:blipFill>
         <p:spPr>
-          <a:xfrm>
-            <a:off x="0" y="5907087"/>
-            <a:ext cx="1766399" cy="644769"/>
+          <a:xfrm flipH="1">
+            <a:off x="3659368" y="3316705"/>
+            <a:ext cx="458996" cy="458996"/>
+          </a:xfrm>
+          <a:prstGeom prst="rect">
+            <a:avLst/>
+          </a:prstGeom>
+        </p:spPr>
+      </p:pic>
+      <p:pic>
+        <p:nvPicPr>
+          <p:cNvPr id="7" name="Picture 6" descr="Global Alliance for Genomics and Health · GitHub">
+            <a:extLst>
+              <a:ext uri="{FF2B5EF4-FFF2-40B4-BE49-F238E27FC236}">
+                <a16:creationId xmlns:a16="http://schemas.microsoft.com/office/drawing/2014/main" id="{9DA1EE29-7371-6917-C407-85BC47AA2CF0}"/>
+              </a:ext>
+            </a:extLst>
+          </p:cNvPr>
+          <p:cNvPicPr>
+            <a:picLocks noChangeAspect="1"/>
+          </p:cNvPicPr>
+          <p:nvPr/>
+        </p:nvPicPr>
+        <p:blipFill>
+          <a:blip r:embed="rId5"/>
+          <a:stretch>
+            <a:fillRect/>
+          </a:stretch>
+        </p:blipFill>
+        <p:spPr>
+          <a:xfrm flipH="1">
+            <a:off x="4408196" y="3316705"/>
+            <a:ext cx="458996" cy="458996"/>
+          </a:xfrm>
+          <a:prstGeom prst="rect">
+            <a:avLst/>
+          </a:prstGeom>
+        </p:spPr>
+      </p:pic>
+      <p:pic>
+        <p:nvPicPr>
+          <p:cNvPr id="8" name="Picture 7" descr="Genomic Analysis, Visualization and Informatics Lab-space ...">
+            <a:extLst>
+              <a:ext uri="{FF2B5EF4-FFF2-40B4-BE49-F238E27FC236}">
+                <a16:creationId xmlns:a16="http://schemas.microsoft.com/office/drawing/2014/main" id="{698209FD-E982-DD47-699E-F0464BD75348}"/>
+              </a:ext>
+            </a:extLst>
+          </p:cNvPr>
+          <p:cNvPicPr>
+            <a:picLocks noChangeAspect="1"/>
+          </p:cNvPicPr>
+          <p:nvPr/>
+        </p:nvPicPr>
+        <p:blipFill>
+          <a:blip r:embed="rId6"/>
+          <a:stretch>
+            <a:fillRect/>
+          </a:stretch>
+        </p:blipFill>
+        <p:spPr>
+          <a:xfrm flipH="1">
+            <a:off x="5157024" y="3312694"/>
+            <a:ext cx="551678" cy="458996"/>
           </a:xfrm>
           <a:prstGeom prst="rect">
             <a:avLst/>
@@ -20799,6 +20816,54 @@
               </a:rPr>
               <a:t>Use Git for versioning, review, automation, and releases.</a:t>
             </a:r>
+          </a:p>
+        </p:txBody>
+      </p:sp>
+      <p:sp>
+        <p:nvSpPr>
+          <p:cNvPr id="6" name="TextBox 5">
+            <a:extLst>
+              <a:ext uri="{FF2B5EF4-FFF2-40B4-BE49-F238E27FC236}">
+                <a16:creationId xmlns:a16="http://schemas.microsoft.com/office/drawing/2014/main" id="{5B29691C-50FD-24CB-C306-F25E61BCE58D}"/>
+              </a:ext>
+            </a:extLst>
+          </p:cNvPr>
+          <p:cNvSpPr txBox="1"/>
+          <p:nvPr/>
+        </p:nvSpPr>
+        <p:spPr>
+          <a:xfrm rot="2738292">
+            <a:off x="10839423" y="379756"/>
+            <a:ext cx="1492049" cy="300082"/>
+          </a:xfrm>
+          <a:prstGeom prst="rect">
+            <a:avLst/>
+          </a:prstGeom>
+          <a:noFill/>
+        </p:spPr>
+        <p:txBody>
+          <a:bodyPr wrap="square">
+            <a:spAutoFit/>
+          </a:bodyPr>
+          <a:lstStyle/>
+          <a:p>
+            <a:r>
+              <a:rPr lang="en-US" sz="1350" b="1" dirty="0">
+                <a:solidFill>
+                  <a:srgbClr val="041F4F"/>
+                </a:solidFill>
+                <a:highlight>
+                  <a:srgbClr val="FFFF00"/>
+                </a:highlight>
+                <a:latin typeface="Aptos"/>
+              </a:rPr>
+              <a:t>Data Producer </a:t>
+            </a:r>
+            <a:endParaRPr lang="en-US" dirty="0">
+              <a:highlight>
+                <a:srgbClr val="FFFF00"/>
+              </a:highlight>
+            </a:endParaRPr>
           </a:p>
         </p:txBody>
       </p:sp>
